--- a/services/web-app/resources/thesis-essay-decks/lesson-3-thesis-statement.pptx
+++ b/services/web-app/resources/thesis-essay-decks/lesson-3-thesis-statement.pptx
@@ -5114,7 +5114,7 @@
       </p:sp>
       <p:pic>
         <p:nvPicPr>
-          <p:cNvPr id="7" name="Image 0" descr="/home/user/yawp/services/web-app/scripts/thesis-essay-decks/assets/icons/lightbulb.png">    </p:cNvPr>
+          <p:cNvPr id="7" name="Image 0" descr="lightbulb icon">    </p:cNvPr>
           <p:cNvPicPr>
             <a:picLocks noChangeAspect="1"/>
           </p:cNvPicPr>
@@ -5163,7 +5163,7 @@
       </p:sp>
       <p:pic>
         <p:nvPicPr>
-          <p:cNvPr id="9" name="Image 1" descr="/home/user/yawp/services/web-app/scripts/thesis-essay-decks/assets/icons/puzzle.png">    </p:cNvPr>
+          <p:cNvPr id="9" name="Image 1" descr="puzzle icon">    </p:cNvPr>
           <p:cNvPicPr>
             <a:picLocks noChangeAspect="1"/>
           </p:cNvPicPr>
@@ -5212,7 +5212,7 @@
       </p:sp>
       <p:pic>
         <p:nvPicPr>
-          <p:cNvPr id="11" name="Image 2" descr="/home/user/yawp/services/web-app/scripts/thesis-essay-decks/assets/icons/thumbs.png">    </p:cNvPr>
+          <p:cNvPr id="11" name="Image 2" descr="thumbs icon">    </p:cNvPr>
           <p:cNvPicPr>
             <a:picLocks noChangeAspect="1"/>
           </p:cNvPicPr>
@@ -5782,7 +5782,7 @@
       </p:sp>
       <p:pic>
         <p:nvPicPr>
-          <p:cNvPr id="5" name="Image 0" descr="/home/user/yawp/services/web-app/scripts/thesis-essay-decks/assets/icons/question.png">    </p:cNvPr>
+          <p:cNvPr id="5" name="Image 0" descr="question icon">    </p:cNvPr>
           <p:cNvPicPr>
             <a:picLocks noChangeAspect="1"/>
           </p:cNvPicPr>
@@ -5892,12 +5892,6 @@
               </a:rPr>
               <a:t>Hopefully someone in the room says it: </a:t>
             </a:r>
-            <a:pPr indent="0" marL="0">
-              <a:lnSpc>
-                <a:spcPct val="115000"/>
-              </a:lnSpc>
-              <a:buNone/>
-            </a:pPr>
             <a:r>
               <a:rPr lang="en-US" sz="4000" dirty="0">
                 <a:solidFill>
@@ -6103,7 +6097,7 @@
       </p:sp>
       <p:pic>
         <p:nvPicPr>
-          <p:cNvPr id="5" name="Image 0" descr="/home/user/yawp/services/web-app/scripts/thesis-essay-decks/assets/critical-essay-form.png">    </p:cNvPr>
+          <p:cNvPr id="5" name="Image 0" descr="The critical essay form: introduction, body paragraphs and conclusion.">    </p:cNvPr>
           <p:cNvPicPr>
             <a:picLocks noChangeAspect="1"/>
           </p:cNvPicPr>
@@ -6252,9 +6246,6 @@
               </a:rPr>
               <a:t>Thesis statement</a:t>
             </a:r>
-            <a:pPr indent="0" marL="0">
-              <a:buNone/>
-            </a:pPr>
             <a:r>
               <a:rPr lang="en-US" sz="2400" dirty="0">
                 <a:solidFill>
@@ -6576,7 +6567,7 @@
       </p:sp>
       <p:pic>
         <p:nvPicPr>
-          <p:cNvPr id="5" name="Image 0" descr="/home/user/yawp/services/web-app/scripts/thesis-essay-decks/assets/icons/lightbulb.png">    </p:cNvPr>
+          <p:cNvPr id="5" name="Image 0" descr="lightbulb icon">    </p:cNvPr>
           <p:cNvPicPr>
             <a:picLocks noChangeAspect="1"/>
           </p:cNvPicPr>
@@ -6686,12 +6677,6 @@
               </a:rPr>
               <a:t>(And weak or non-existent thesis statements lead to </a:t>
             </a:r>
-            <a:pPr indent="0" marL="0">
-              <a:lnSpc>
-                <a:spcPct val="115000"/>
-              </a:lnSpc>
-              <a:buNone/>
-            </a:pPr>
             <a:r>
               <a:rPr lang="en-US" sz="4000" dirty="0">
                 <a:solidFill>
@@ -6706,12 +6691,6 @@
               </a:rPr>
               <a:t>weak essays!</a:t>
             </a:r>
-            <a:pPr indent="0" marL="0">
-              <a:lnSpc>
-                <a:spcPct val="115000"/>
-              </a:lnSpc>
-              <a:buNone/>
-            </a:pPr>
             <a:r>
               <a:rPr lang="en-US" sz="4000" dirty="0">
                 <a:solidFill>
@@ -7044,12 +7023,6 @@
               </a:rPr>
               <a:t>…serves the purpose of </a:t>
             </a:r>
-            <a:pPr indent="0" marL="0">
-              <a:lnSpc>
-                <a:spcPct val="115000"/>
-              </a:lnSpc>
-              <a:buNone/>
-            </a:pPr>
             <a:r>
               <a:rPr lang="en-US" sz="2100" dirty="0">
                 <a:solidFill>
@@ -7064,12 +7037,6 @@
               </a:rPr>
               <a:t>narrowing your topic</a:t>
             </a:r>
-            <a:pPr indent="0" marL="0">
-              <a:lnSpc>
-                <a:spcPct val="115000"/>
-              </a:lnSpc>
-              <a:buNone/>
-            </a:pPr>
             <a:r>
               <a:rPr lang="en-US" sz="2100" dirty="0">
                 <a:solidFill>
@@ -7297,12 +7264,6 @@
               </a:rPr>
               <a:t>When you get to this point, you’re very close to </a:t>
             </a:r>
-            <a:pPr indent="0" marL="0">
-              <a:lnSpc>
-                <a:spcPct val="115000"/>
-              </a:lnSpc>
-              <a:buNone/>
-            </a:pPr>
             <a:r>
               <a:rPr lang="en-US" sz="2100" dirty="0">
                 <a:solidFill>
@@ -7580,7 +7541,7 @@
       </p:sp>
       <p:pic>
         <p:nvPicPr>
-          <p:cNvPr id="7" name="Image 0" descr="/home/user/yawp/services/web-app/scripts/thesis-essay-decks/assets/icons/lightbulb.png">    </p:cNvPr>
+          <p:cNvPr id="7" name="Image 0" descr="lightbulb icon">    </p:cNvPr>
           <p:cNvPicPr>
             <a:picLocks noChangeAspect="1"/>
           </p:cNvPicPr>
@@ -7629,7 +7590,7 @@
       </p:sp>
       <p:pic>
         <p:nvPicPr>
-          <p:cNvPr id="9" name="Image 1" descr="/home/user/yawp/services/web-app/scripts/thesis-essay-decks/assets/icons/puzzle.png">    </p:cNvPr>
+          <p:cNvPr id="9" name="Image 1" descr="puzzle icon">    </p:cNvPr>
           <p:cNvPicPr>
             <a:picLocks noChangeAspect="1"/>
           </p:cNvPicPr>
@@ -7678,7 +7639,7 @@
       </p:sp>
       <p:pic>
         <p:nvPicPr>
-          <p:cNvPr id="11" name="Image 2" descr="/home/user/yawp/services/web-app/scripts/thesis-essay-decks/assets/icons/thumbs.png">    </p:cNvPr>
+          <p:cNvPr id="11" name="Image 2" descr="thumbs icon">    </p:cNvPr>
           <p:cNvPicPr>
             <a:picLocks noChangeAspect="1"/>
           </p:cNvPicPr>
@@ -8022,9 +7983,6 @@
               </a:rPr>
               <a:t>Your thesis statement represents the </a:t>
             </a:r>
-            <a:pPr indent="0" marL="0">
-              <a:buNone/>
-            </a:pPr>
             <a:r>
               <a:rPr lang="en-US" sz="3000" dirty="0">
                 <a:solidFill>
@@ -8039,9 +7997,6 @@
               </a:rPr>
               <a:t>focal point</a:t>
             </a:r>
-            <a:pPr indent="0" marL="0">
-              <a:buNone/>
-            </a:pPr>
             <a:r>
               <a:rPr lang="en-US" sz="3000" dirty="0">
                 <a:solidFill>
@@ -8084,7 +8039,7 @@
       </p:sp>
       <p:pic>
         <p:nvPicPr>
-          <p:cNvPr id="5" name="Image 0" descr="/home/user/yawp/services/web-app/scripts/thesis-essay-decks/assets/icons/diamond.png">    </p:cNvPr>
+          <p:cNvPr id="5" name="Image 0" descr="diamond icon">    </p:cNvPr>
           <p:cNvPicPr>
             <a:picLocks noChangeAspect="1"/>
           </p:cNvPicPr>
@@ -8376,7 +8331,7 @@
       </p:sp>
       <p:pic>
         <p:nvPicPr>
-          <p:cNvPr id="5" name="Image 0" descr="/home/user/yawp/services/web-app/scripts/thesis-essay-decks/assets/icons/pencil.png">    </p:cNvPr>
+          <p:cNvPr id="5" name="Image 0" descr="pencil icon">    </p:cNvPr>
           <p:cNvPicPr>
             <a:picLocks noChangeAspect="1"/>
           </p:cNvPicPr>
@@ -8606,9 +8561,6 @@
               </a:rPr>
               <a:t>Your thesis should be </a:t>
             </a:r>
-            <a:pPr indent="0" marL="0">
-              <a:buNone/>
-            </a:pPr>
             <a:r>
               <a:rPr lang="en-US" sz="2600" dirty="0">
                 <a:solidFill>
@@ -8623,9 +8575,6 @@
               </a:rPr>
               <a:t>one sentence</a:t>
             </a:r>
-            <a:pPr indent="0" marL="0">
-              <a:buNone/>
-            </a:pPr>
             <a:r>
               <a:rPr lang="en-US" sz="2600" dirty="0">
                 <a:solidFill>
@@ -8799,9 +8748,6 @@
               </a:rPr>
               <a:t>Your thesis should include </a:t>
             </a:r>
-            <a:pPr indent="0" marL="0">
-              <a:buNone/>
-            </a:pPr>
             <a:r>
               <a:rPr lang="en-US" sz="2600" dirty="0">
                 <a:solidFill>
@@ -8816,9 +8762,6 @@
               </a:rPr>
               <a:t>observation</a:t>
             </a:r>
-            <a:pPr indent="0" marL="0">
-              <a:buNone/>
-            </a:pPr>
             <a:r>
               <a:rPr lang="en-US" sz="2600" dirty="0">
                 <a:solidFill>
@@ -8830,9 +8773,6 @@
               </a:rPr>
               <a:t> as well as </a:t>
             </a:r>
-            <a:pPr indent="0" marL="0">
-              <a:buNone/>
-            </a:pPr>
             <a:r>
               <a:rPr lang="en-US" sz="2600" dirty="0">
                 <a:solidFill>
@@ -9009,9 +8949,6 @@
               </a:rPr>
               <a:t>Your thesis should be </a:t>
             </a:r>
-            <a:pPr indent="0" marL="0">
-              <a:buNone/>
-            </a:pPr>
             <a:r>
               <a:rPr lang="en-US" sz="2600" dirty="0">
                 <a:solidFill>
@@ -9177,9 +9114,6 @@
               </a:rPr>
               <a:t>What do we mean by </a:t>
             </a:r>
-            <a:pPr indent="0" marL="0">
-              <a:buNone/>
-            </a:pPr>
             <a:r>
               <a:rPr lang="en-US" sz="3600" dirty="0">
                 <a:solidFill>
@@ -9225,7 +9159,7 @@
       </p:sp>
       <p:pic>
         <p:nvPicPr>
-          <p:cNvPr id="5" name="Image 0" descr="/home/user/yawp/services/web-app/scripts/thesis-essay-decks/assets/icons/eye.png">    </p:cNvPr>
+          <p:cNvPr id="5" name="Image 0" descr="eye icon">    </p:cNvPr>
           <p:cNvPicPr>
             <a:picLocks noChangeAspect="1"/>
           </p:cNvPicPr>
@@ -9486,9 +9420,6 @@
               </a:rPr>
               <a:t>An observation is something we </a:t>
             </a:r>
-            <a:pPr indent="0" marL="0">
-              <a:buNone/>
-            </a:pPr>
             <a:r>
               <a:rPr lang="en-US" sz="3000" dirty="0">
                 <a:solidFill>
@@ -9503,9 +9434,6 @@
               </a:rPr>
               <a:t>notice or see</a:t>
             </a:r>
-            <a:pPr indent="0" marL="0">
-              <a:buNone/>
-            </a:pPr>
             <a:r>
               <a:rPr lang="en-US" sz="3000" dirty="0">
                 <a:solidFill>
@@ -9548,7 +9476,7 @@
       </p:sp>
       <p:pic>
         <p:nvPicPr>
-          <p:cNvPr id="5" name="Image 0" descr="/home/user/yawp/services/web-app/scripts/thesis-essay-decks/assets/icons/eye.png">    </p:cNvPr>
+          <p:cNvPr id="5" name="Image 0" descr="eye icon">    </p:cNvPr>
           <p:cNvPicPr>
             <a:picLocks noChangeAspect="1"/>
           </p:cNvPicPr>
@@ -9840,7 +9768,7 @@
       </p:sp>
       <p:pic>
         <p:nvPicPr>
-          <p:cNvPr id="5" name="Image 0" descr="/home/user/yawp/services/web-app/scripts/thesis-essay-decks/assets/icons/eye.png">    </p:cNvPr>
+          <p:cNvPr id="5" name="Image 0" descr="eye icon">    </p:cNvPr>
           <p:cNvPicPr>
             <a:picLocks noChangeAspect="1"/>
           </p:cNvPicPr>
@@ -10132,7 +10060,7 @@
       </p:sp>
       <p:pic>
         <p:nvPicPr>
-          <p:cNvPr id="5" name="Image 0" descr="/home/user/yawp/services/web-app/scripts/thesis-essay-decks/assets/icons/question.png">    </p:cNvPr>
+          <p:cNvPr id="5" name="Image 0" descr="question icon">    </p:cNvPr>
           <p:cNvPicPr>
             <a:picLocks noChangeAspect="1"/>
           </p:cNvPicPr>
@@ -10956,7 +10884,7 @@
       </p:sp>
       <p:pic>
         <p:nvPicPr>
-          <p:cNvPr id="5" name="Image 0" descr="/home/user/yawp/services/web-app/scripts/thesis-essay-decks/assets/icons/eye.png">    </p:cNvPr>
+          <p:cNvPr id="5" name="Image 0" descr="eye icon">    </p:cNvPr>
           <p:cNvPicPr>
             <a:picLocks noChangeAspect="1"/>
           </p:cNvPicPr>
@@ -11248,7 +11176,7 @@
       </p:sp>
       <p:pic>
         <p:nvPicPr>
-          <p:cNvPr id="5" name="Image 0" descr="/home/user/yawp/services/web-app/scripts/thesis-essay-decks/assets/icons/eye.png">    </p:cNvPr>
+          <p:cNvPr id="5" name="Image 0" descr="eye icon">    </p:cNvPr>
           <p:cNvPicPr>
             <a:picLocks noChangeAspect="1"/>
           </p:cNvPicPr>
@@ -11540,7 +11468,7 @@
       </p:sp>
       <p:pic>
         <p:nvPicPr>
-          <p:cNvPr id="5" name="Image 0" descr="/home/user/yawp/services/web-app/scripts/thesis-essay-decks/assets/icons/pencil.png">    </p:cNvPr>
+          <p:cNvPr id="5" name="Image 0" descr="pencil icon">    </p:cNvPr>
           <p:cNvPicPr>
             <a:picLocks noChangeAspect="1"/>
           </p:cNvPicPr>
@@ -12276,7 +12204,7 @@
       </p:sp>
       <p:pic>
         <p:nvPicPr>
-          <p:cNvPr id="5" name="Image 0" descr="/home/user/yawp/services/web-app/scripts/thesis-essay-decks/assets/icons/question.png">    </p:cNvPr>
+          <p:cNvPr id="5" name="Image 0" descr="question icon">    </p:cNvPr>
           <p:cNvPicPr>
             <a:picLocks noChangeAspect="1"/>
           </p:cNvPicPr>
@@ -12386,12 +12314,6 @@
               </a:rPr>
               <a:t>Without </a:t>
             </a:r>
-            <a:pPr indent="0" marL="0">
-              <a:lnSpc>
-                <a:spcPct val="115000"/>
-              </a:lnSpc>
-              <a:buNone/>
-            </a:pPr>
             <a:r>
               <a:rPr lang="en-US" sz="4000" dirty="0">
                 <a:solidFill>
@@ -12406,12 +12328,6 @@
               </a:rPr>
               <a:t>analysis,</a:t>
             </a:r>
-            <a:pPr indent="0" marL="0">
-              <a:lnSpc>
-                <a:spcPct val="115000"/>
-              </a:lnSpc>
-              <a:buNone/>
-            </a:pPr>
             <a:r>
               <a:rPr lang="en-US" sz="4000" dirty="0">
                 <a:solidFill>
@@ -12574,9 +12490,6 @@
               </a:rPr>
               <a:t>What do we mean by </a:t>
             </a:r>
-            <a:pPr indent="0" marL="0">
-              <a:buNone/>
-            </a:pPr>
             <a:r>
               <a:rPr lang="en-US" sz="3600" dirty="0">
                 <a:solidFill>
@@ -12622,7 +12535,7 @@
       </p:sp>
       <p:pic>
         <p:nvPicPr>
-          <p:cNvPr id="5" name="Image 0" descr="/home/user/yawp/services/web-app/scripts/thesis-essay-decks/assets/icons/question.png">    </p:cNvPr>
+          <p:cNvPr id="5" name="Image 0" descr="question icon">    </p:cNvPr>
           <p:cNvPicPr>
             <a:picLocks noChangeAspect="1"/>
           </p:cNvPicPr>
@@ -12883,9 +12796,6 @@
               </a:rPr>
               <a:t>Analysis is a </a:t>
             </a:r>
-            <a:pPr indent="0" marL="0">
-              <a:buNone/>
-            </a:pPr>
             <a:r>
               <a:rPr lang="en-US" sz="2600" dirty="0">
                 <a:solidFill>
@@ -12900,9 +12810,6 @@
               </a:rPr>
               <a:t>reaction, argument, examination, or conclusion</a:t>
             </a:r>
-            <a:pPr indent="0" marL="0">
-              <a:buNone/>
-            </a:pPr>
             <a:r>
               <a:rPr lang="en-US" sz="2600" dirty="0">
                 <a:solidFill>
@@ -12945,7 +12852,7 @@
       </p:sp>
       <p:pic>
         <p:nvPicPr>
-          <p:cNvPr id="5" name="Image 0" descr="/home/user/yawp/services/web-app/scripts/thesis-essay-decks/assets/icons/lightbulb.png">    </p:cNvPr>
+          <p:cNvPr id="5" name="Image 0" descr="lightbulb icon">    </p:cNvPr>
           <p:cNvPicPr>
             <a:picLocks noChangeAspect="1"/>
           </p:cNvPicPr>
@@ -14671,7 +14578,7 @@
       </p:sp>
       <p:pic>
         <p:nvPicPr>
-          <p:cNvPr id="5" name="Image 0" descr="/home/user/yawp/services/web-app/scripts/thesis-essay-decks/assets/icons/puzzle.png">    </p:cNvPr>
+          <p:cNvPr id="5" name="Image 0" descr="puzzle icon">    </p:cNvPr>
           <p:cNvPicPr>
             <a:picLocks noChangeAspect="1"/>
           </p:cNvPicPr>
@@ -14906,12 +14813,6 @@
               </a:rPr>
               <a:t>On your document, create your own </a:t>
             </a:r>
-            <a:pPr indent="0" marL="0">
-              <a:lnSpc>
-                <a:spcPct val="120000"/>
-              </a:lnSpc>
-              <a:buNone/>
-            </a:pPr>
             <a:r>
               <a:rPr lang="en-US" sz="1800" dirty="0">
                 <a:solidFill>
@@ -14926,12 +14827,6 @@
               </a:rPr>
               <a:t>Observation</a:t>
             </a:r>
-            <a:pPr indent="0" marL="0">
-              <a:lnSpc>
-                <a:spcPct val="120000"/>
-              </a:lnSpc>
-              <a:buNone/>
-            </a:pPr>
             <a:r>
               <a:rPr lang="en-US" sz="1800" dirty="0">
                 <a:solidFill>
@@ -14943,12 +14838,6 @@
               </a:rPr>
               <a:t> and </a:t>
             </a:r>
-            <a:pPr indent="0" marL="0">
-              <a:lnSpc>
-                <a:spcPct val="120000"/>
-              </a:lnSpc>
-              <a:buNone/>
-            </a:pPr>
             <a:r>
               <a:rPr lang="en-US" sz="1800" dirty="0">
                 <a:solidFill>
@@ -14963,12 +14852,6 @@
               </a:rPr>
               <a:t>2–4 points of analysis.</a:t>
             </a:r>
-            <a:pPr indent="0" marL="0">
-              <a:lnSpc>
-                <a:spcPct val="120000"/>
-              </a:lnSpc>
-              <a:buNone/>
-            </a:pPr>
             <a:r>
               <a:rPr lang="en-US" sz="1800" dirty="0">
                 <a:solidFill>
@@ -15271,7 +15154,7 @@
       </p:sp>
       <p:pic>
         <p:nvPicPr>
-          <p:cNvPr id="5" name="Image 0" descr="/home/user/yawp/services/web-app/scripts/thesis-essay-decks/assets/icons/question.png">    </p:cNvPr>
+          <p:cNvPr id="5" name="Image 0" descr="question icon">    </p:cNvPr>
           <p:cNvPicPr>
             <a:picLocks noChangeAspect="1"/>
           </p:cNvPicPr>
@@ -16107,7 +15990,7 @@
       </p:sp>
       <p:pic>
         <p:nvPicPr>
-          <p:cNvPr id="5" name="Image 0" descr="/home/user/yawp/services/web-app/scripts/thesis-essay-decks/assets/yawp-editor-thesis.png">    </p:cNvPr>
+          <p:cNvPr id="5" name="Image 0" descr="The YAWP! editor on the Thesis Statement step.">    </p:cNvPr>
           <p:cNvPicPr>
             <a:picLocks noChangeAspect="1"/>
           </p:cNvPicPr>
@@ -16189,9 +16072,6 @@
               </a:rPr>
               <a:t>The Tutor says </a:t>
             </a:r>
-            <a:pPr indent="0" marL="0">
-              <a:buNone/>
-            </a:pPr>
             <a:r>
               <a:rPr lang="en-US" sz="2000" dirty="0">
                 <a:solidFill>
@@ -18565,7 +18445,7 @@
       </p:sp>
       <p:pic>
         <p:nvPicPr>
-          <p:cNvPr id="5" name="Image 0" descr="/home/user/yawp/services/web-app/scripts/thesis-essay-decks/assets/icons/question.png">    </p:cNvPr>
+          <p:cNvPr id="5" name="Image 0" descr="question icon">    </p:cNvPr>
           <p:cNvPicPr>
             <a:picLocks noChangeAspect="1"/>
           </p:cNvPicPr>
@@ -18699,7 +18579,7 @@
       </p:sp>
       <p:pic>
         <p:nvPicPr>
-          <p:cNvPr id="9" name="Image 1" descr="/home/user/yawp/services/web-app/scripts/thesis-essay-decks/assets/icons/timer.png">    </p:cNvPr>
+          <p:cNvPr id="9" name="Image 1" descr="timer icon">    </p:cNvPr>
           <p:cNvPicPr>
             <a:picLocks noChangeAspect="1"/>
           </p:cNvPicPr>
@@ -18833,7 +18713,7 @@
       </p:sp>
       <p:pic>
         <p:nvPicPr>
-          <p:cNvPr id="13" name="Image 2" descr="/home/user/yawp/services/web-app/scripts/thesis-essay-decks/assets/icons/lightbulb.png">    </p:cNvPr>
+          <p:cNvPr id="13" name="Image 2" descr="lightbulb icon">    </p:cNvPr>
           <p:cNvPicPr>
             <a:picLocks noChangeAspect="1"/>
           </p:cNvPicPr>
@@ -19111,7 +18991,7 @@
       </p:sp>
       <p:pic>
         <p:nvPicPr>
-          <p:cNvPr id="5" name="Image 0" descr="/home/user/yawp/services/web-app/scripts/thesis-essay-decks/assets/icons/thumbs.png">    </p:cNvPr>
+          <p:cNvPr id="5" name="Image 0" descr="thumbs icon">    </p:cNvPr>
           <p:cNvPicPr>
             <a:picLocks noChangeAspect="1"/>
           </p:cNvPicPr>
@@ -19221,12 +19101,6 @@
               </a:rPr>
               <a:t>…so don’t ever begin writing your essay until you’ve created a </a:t>
             </a:r>
-            <a:pPr indent="0" marL="0">
-              <a:lnSpc>
-                <a:spcPct val="115000"/>
-              </a:lnSpc>
-              <a:buNone/>
-            </a:pPr>
             <a:r>
               <a:rPr lang="en-US" sz="4000" dirty="0">
                 <a:solidFill>
@@ -19423,7 +19297,7 @@
       </p:sp>
       <p:pic>
         <p:nvPicPr>
-          <p:cNvPr id="5" name="Image 0" descr="/home/user/yawp/services/web-app/scripts/thesis-essay-decks/assets/icons/pencil.png">    </p:cNvPr>
+          <p:cNvPr id="5" name="Image 0" descr="pencil icon">    </p:cNvPr>
           <p:cNvPicPr>
             <a:picLocks noChangeAspect="1"/>
           </p:cNvPicPr>
@@ -19653,9 +19527,6 @@
               </a:rPr>
               <a:t>One, complex, </a:t>
             </a:r>
-            <a:pPr indent="0" marL="0">
-              <a:buNone/>
-            </a:pPr>
             <a:r>
               <a:rPr lang="en-US" sz="2300" dirty="0">
                 <a:solidFill>
@@ -19670,9 +19541,6 @@
               </a:rPr>
               <a:t>concise</a:t>
             </a:r>
-            <a:pPr indent="0" marL="0">
-              <a:buNone/>
-            </a:pPr>
             <a:r>
               <a:rPr lang="en-US" sz="2300" dirty="0">
                 <a:solidFill>
@@ -19846,9 +19714,6 @@
               </a:rPr>
               <a:t>Includes </a:t>
             </a:r>
-            <a:pPr indent="0" marL="0">
-              <a:buNone/>
-            </a:pPr>
             <a:r>
               <a:rPr lang="en-US" sz="2300" dirty="0">
                 <a:solidFill>
@@ -20288,7 +20153,7 @@
       </p:sp>
       <p:pic>
         <p:nvPicPr>
-          <p:cNvPr id="7" name="Image 0" descr="/home/user/yawp/services/web-app/scripts/thesis-essay-decks/assets/icons/lightbulb.png">    </p:cNvPr>
+          <p:cNvPr id="7" name="Image 0" descr="lightbulb icon">    </p:cNvPr>
           <p:cNvPicPr>
             <a:picLocks noChangeAspect="1"/>
           </p:cNvPicPr>
@@ -20337,7 +20202,7 @@
       </p:sp>
       <p:pic>
         <p:nvPicPr>
-          <p:cNvPr id="9" name="Image 1" descr="/home/user/yawp/services/web-app/scripts/thesis-essay-decks/assets/icons/puzzle.png">    </p:cNvPr>
+          <p:cNvPr id="9" name="Image 1" descr="puzzle icon">    </p:cNvPr>
           <p:cNvPicPr>
             <a:picLocks noChangeAspect="1"/>
           </p:cNvPicPr>
@@ -20386,7 +20251,7 @@
       </p:sp>
       <p:pic>
         <p:nvPicPr>
-          <p:cNvPr id="11" name="Image 2" descr="/home/user/yawp/services/web-app/scripts/thesis-essay-decks/assets/icons/thumbs.png">    </p:cNvPr>
+          <p:cNvPr id="11" name="Image 2" descr="thumbs icon">    </p:cNvPr>
           <p:cNvPicPr>
             <a:picLocks noChangeAspect="1"/>
           </p:cNvPicPr>
@@ -20730,9 +20595,6 @@
               </a:rPr>
               <a:t>Avoid the verb </a:t>
             </a:r>
-            <a:pPr indent="0" marL="0">
-              <a:buNone/>
-            </a:pPr>
             <a:r>
               <a:rPr lang="en-US" sz="3600" dirty="0">
                 <a:solidFill>
@@ -20778,7 +20640,7 @@
       </p:sp>
       <p:pic>
         <p:nvPicPr>
-          <p:cNvPr id="5" name="Image 0" descr="/home/user/yawp/services/web-app/scripts/thesis-essay-decks/assets/icons/pencil.png">    </p:cNvPr>
+          <p:cNvPr id="5" name="Image 0" descr="pencil icon">    </p:cNvPr>
           <p:cNvPicPr>
             <a:picLocks noChangeAspect="1"/>
           </p:cNvPicPr>
@@ -21070,7 +20932,7 @@
       </p:sp>
       <p:pic>
         <p:nvPicPr>
-          <p:cNvPr id="5" name="Image 0" descr="/home/user/yawp/services/web-app/scripts/thesis-essay-decks/assets/icons/question.png">    </p:cNvPr>
+          <p:cNvPr id="5" name="Image 0" descr="question icon">    </p:cNvPr>
           <p:cNvPicPr>
             <a:picLocks noChangeAspect="1"/>
           </p:cNvPicPr>
@@ -21239,12 +21101,6 @@
               </a:rPr>
               <a:t>Creative design in lesson plans </a:t>
             </a:r>
-            <a:pPr indent="0" marL="0">
-              <a:lnSpc>
-                <a:spcPct val="125000"/>
-              </a:lnSpc>
-              <a:buNone/>
-            </a:pPr>
             <a:r>
               <a:rPr lang="en-US" sz="3200" b="1" dirty="0">
                 <a:solidFill>
@@ -21256,12 +21112,6 @@
               </a:rPr>
               <a:t>is</a:t>
             </a:r>
-            <a:pPr indent="0" marL="0">
-              <a:lnSpc>
-                <a:spcPct val="125000"/>
-              </a:lnSpc>
-              <a:buNone/>
-            </a:pPr>
             <a:r>
               <a:rPr lang="en-US" sz="3200" dirty="0">
                 <a:solidFill>
@@ -21273,12 +21123,6 @@
               </a:rPr>
               <a:t> really important and </a:t>
             </a:r>
-            <a:pPr indent="0" marL="0">
-              <a:lnSpc>
-                <a:spcPct val="125000"/>
-              </a:lnSpc>
-              <a:buNone/>
-            </a:pPr>
             <a:r>
               <a:rPr lang="en-US" sz="3200" b="1" dirty="0">
                 <a:solidFill>
@@ -21290,12 +21134,6 @@
               </a:rPr>
               <a:t>is</a:t>
             </a:r>
-            <a:pPr indent="0" marL="0">
-              <a:lnSpc>
-                <a:spcPct val="125000"/>
-              </a:lnSpc>
-              <a:buNone/>
-            </a:pPr>
             <a:r>
               <a:rPr lang="en-US" sz="3200" dirty="0">
                 <a:solidFill>
@@ -21307,12 +21145,6 @@
               </a:rPr>
               <a:t> something that </a:t>
             </a:r>
-            <a:pPr indent="0" marL="0">
-              <a:lnSpc>
-                <a:spcPct val="125000"/>
-              </a:lnSpc>
-              <a:buNone/>
-            </a:pPr>
             <a:r>
               <a:rPr lang="en-US" sz="3200" b="1" dirty="0">
                 <a:solidFill>
@@ -21324,12 +21156,6 @@
               </a:rPr>
               <a:t>isn’t</a:t>
             </a:r>
-            <a:pPr indent="0" marL="0">
-              <a:lnSpc>
-                <a:spcPct val="125000"/>
-              </a:lnSpc>
-              <a:buNone/>
-            </a:pPr>
             <a:r>
               <a:rPr lang="en-US" sz="3200" dirty="0">
                 <a:solidFill>
@@ -21523,7 +21349,7 @@
       </p:sp>
       <p:pic>
         <p:nvPicPr>
-          <p:cNvPr id="5" name="Image 0" descr="/home/user/yawp/services/web-app/scripts/thesis-essay-decks/assets/icons/question.png">    </p:cNvPr>
+          <p:cNvPr id="5" name="Image 0" descr="question icon">    </p:cNvPr>
           <p:cNvPicPr>
             <a:picLocks noChangeAspect="1"/>
           </p:cNvPicPr>
@@ -22347,7 +22173,7 @@
       </p:sp>
       <p:pic>
         <p:nvPicPr>
-          <p:cNvPr id="5" name="Image 0" descr="/home/user/yawp/services/web-app/scripts/thesis-essay-decks/assets/icons/pencil.png">    </p:cNvPr>
+          <p:cNvPr id="5" name="Image 0" descr="pencil icon">    </p:cNvPr>
           <p:cNvPicPr>
             <a:picLocks noChangeAspect="1"/>
           </p:cNvPicPr>
@@ -22457,12 +22283,6 @@
               </a:rPr>
               <a:t>This is much better. It gives the sentence a stronger, more direct feel. This is called being </a:t>
             </a:r>
-            <a:pPr indent="0" marL="0">
-              <a:lnSpc>
-                <a:spcPct val="115000"/>
-              </a:lnSpc>
-              <a:buNone/>
-            </a:pPr>
             <a:r>
               <a:rPr lang="en-US" sz="3200" dirty="0">
                 <a:solidFill>
@@ -22477,12 +22297,6 @@
               </a:rPr>
               <a:t>concise.</a:t>
             </a:r>
-            <a:pPr indent="0" marL="0">
-              <a:lnSpc>
-                <a:spcPct val="115000"/>
-              </a:lnSpc>
-              <a:buNone/>
-            </a:pPr>
             <a:r>
               <a:rPr lang="en-US" sz="3200" dirty="0">
                 <a:solidFill>
@@ -23167,7 +22981,7 @@
       </p:sp>
       <p:pic>
         <p:nvPicPr>
-          <p:cNvPr id="5" name="Image 0" descr="/home/user/yawp/services/web-app/scripts/thesis-essay-decks/assets/icons/lightbulb.png">    </p:cNvPr>
+          <p:cNvPr id="5" name="Image 0" descr="lightbulb icon">    </p:cNvPr>
           <p:cNvPicPr>
             <a:picLocks noChangeAspect="1"/>
           </p:cNvPicPr>
@@ -23277,12 +23091,6 @@
               </a:rPr>
               <a:t>Now that the “to be” clutter is gone, there’s room for </a:t>
             </a:r>
-            <a:pPr indent="0" marL="0">
-              <a:lnSpc>
-                <a:spcPct val="115000"/>
-              </a:lnSpc>
-              <a:buNone/>
-            </a:pPr>
             <a:r>
               <a:rPr lang="en-US" sz="4000" dirty="0">
                 <a:solidFill>
@@ -23479,7 +23287,7 @@
       </p:sp>
       <p:pic>
         <p:nvPicPr>
-          <p:cNvPr id="5" name="Image 0" descr="/home/user/yawp/services/web-app/scripts/thesis-essay-decks/assets/icons/lightbulb.png">    </p:cNvPr>
+          <p:cNvPr id="5" name="Image 0" descr="lightbulb icon">    </p:cNvPr>
           <p:cNvPicPr>
             <a:picLocks noChangeAspect="1"/>
           </p:cNvPicPr>
@@ -23589,12 +23397,6 @@
               </a:rPr>
               <a:t>Taking the verb “to be” out of a sentence is like </a:t>
             </a:r>
-            <a:pPr indent="0" marL="0">
-              <a:lnSpc>
-                <a:spcPct val="115000"/>
-              </a:lnSpc>
-              <a:buNone/>
-            </a:pPr>
             <a:r>
               <a:rPr lang="en-US" sz="3200" dirty="0">
                 <a:solidFill>
@@ -23609,12 +23411,6 @@
               </a:rPr>
               <a:t>weeding a garden:</a:t>
             </a:r>
-            <a:pPr indent="0" marL="0">
-              <a:lnSpc>
-                <a:spcPct val="115000"/>
-              </a:lnSpc>
-              <a:buNone/>
-            </a:pPr>
             <a:r>
               <a:rPr lang="en-US" sz="3200" dirty="0">
                 <a:solidFill>
@@ -23917,12 +23713,6 @@
               </a:rPr>
               <a:t>When </a:t>
             </a:r>
-            <a:pPr indent="0" marL="0">
-              <a:lnSpc>
-                <a:spcPct val="110000"/>
-              </a:lnSpc>
-              <a:buNone/>
-            </a:pPr>
             <a:r>
               <a:rPr lang="en-US" sz="2200" b="1" dirty="0">
                 <a:solidFill>
@@ -23934,12 +23724,6 @@
               </a:rPr>
               <a:t>teacher training programs do not emphasize creative design in lesson plans</a:t>
             </a:r>
-            <a:pPr indent="0" marL="0">
-              <a:lnSpc>
-                <a:spcPct val="110000"/>
-              </a:lnSpc>
-              <a:buNone/>
-            </a:pPr>
             <a:r>
               <a:rPr lang="en-US" sz="2200" dirty="0">
                 <a:solidFill>
@@ -23951,12 +23735,6 @@
               </a:rPr>
               <a:t>, </a:t>
             </a:r>
-            <a:pPr indent="0" marL="0">
-              <a:lnSpc>
-                <a:spcPct val="110000"/>
-              </a:lnSpc>
-              <a:buNone/>
-            </a:pPr>
             <a:r>
               <a:rPr lang="en-US" sz="2200" b="1" dirty="0">
                 <a:solidFill>
@@ -23968,12 +23746,6 @@
               </a:rPr>
               <a:t>teachers fail to understand their role as entertainers</a:t>
             </a:r>
-            <a:pPr indent="0" marL="0">
-              <a:lnSpc>
-                <a:spcPct val="110000"/>
-              </a:lnSpc>
-              <a:buNone/>
-            </a:pPr>
             <a:r>
               <a:rPr lang="en-US" sz="2200" dirty="0">
                 <a:solidFill>
@@ -23985,12 +23757,6 @@
               </a:rPr>
               <a:t>, </a:t>
             </a:r>
-            <a:pPr indent="0" marL="0">
-              <a:lnSpc>
-                <a:spcPct val="110000"/>
-              </a:lnSpc>
-              <a:buNone/>
-            </a:pPr>
             <a:r>
               <a:rPr lang="en-US" sz="2200" b="1" dirty="0">
                 <a:solidFill>
@@ -24002,12 +23768,6 @@
               </a:rPr>
               <a:t>resulting in boring lessons</a:t>
             </a:r>
-            <a:pPr indent="0" marL="0">
-              <a:lnSpc>
-                <a:spcPct val="110000"/>
-              </a:lnSpc>
-              <a:buNone/>
-            </a:pPr>
             <a:r>
               <a:rPr lang="en-US" sz="2200" dirty="0">
                 <a:solidFill>
@@ -24122,9 +23882,6 @@
               </a:rPr>
               <a:t>Observation: </a:t>
             </a:r>
-            <a:pPr indent="0" marL="0">
-              <a:buNone/>
-            </a:pPr>
             <a:r>
               <a:rPr lang="en-US" sz="2200" dirty="0">
                 <a:solidFill>
@@ -24239,9 +23996,6 @@
               </a:rPr>
               <a:t>Analysis: </a:t>
             </a:r>
-            <a:pPr indent="0" marL="0">
-              <a:buNone/>
-            </a:pPr>
             <a:r>
               <a:rPr lang="en-US" sz="2200" dirty="0">
                 <a:solidFill>
@@ -24356,9 +24110,6 @@
               </a:rPr>
               <a:t>Analysis: </a:t>
             </a:r>
-            <a:pPr indent="0" marL="0">
-              <a:buNone/>
-            </a:pPr>
             <a:r>
               <a:rPr lang="en-US" sz="2200" dirty="0">
                 <a:solidFill>
@@ -24552,7 +24303,7 @@
       </p:sp>
       <p:pic>
         <p:nvPicPr>
-          <p:cNvPr id="5" name="Image 0" descr="/home/user/yawp/services/web-app/scripts/thesis-essay-decks/assets/icons/thumbs.png">    </p:cNvPr>
+          <p:cNvPr id="5" name="Image 0" descr="thumbs icon">    </p:cNvPr>
           <p:cNvPicPr>
             <a:picLocks noChangeAspect="1"/>
           </p:cNvPicPr>
@@ -24662,12 +24413,6 @@
               </a:rPr>
               <a:t>(How that lame thesis statement from before just became </a:t>
             </a:r>
-            <a:pPr indent="0" marL="0">
-              <a:lnSpc>
-                <a:spcPct val="115000"/>
-              </a:lnSpc>
-              <a:buNone/>
-            </a:pPr>
             <a:r>
               <a:rPr lang="en-US" sz="4000" dirty="0">
                 <a:solidFill>
@@ -24682,12 +24427,6 @@
               </a:rPr>
               <a:t>kind of awesome?</a:t>
             </a:r>
-            <a:pPr indent="0" marL="0">
-              <a:lnSpc>
-                <a:spcPct val="115000"/>
-              </a:lnSpc>
-              <a:buNone/>
-            </a:pPr>
             <a:r>
               <a:rPr lang="en-US" sz="4000" dirty="0">
                 <a:solidFill>
@@ -24881,7 +24620,7 @@
       </p:sp>
       <p:pic>
         <p:nvPicPr>
-          <p:cNvPr id="5" name="Image 0" descr="/home/user/yawp/services/web-app/scripts/thesis-essay-decks/assets/icons/question.png">    </p:cNvPr>
+          <p:cNvPr id="5" name="Image 0" descr="question icon">    </p:cNvPr>
           <p:cNvPicPr>
             <a:picLocks noChangeAspect="1"/>
           </p:cNvPicPr>
@@ -25708,7 +25447,7 @@
       </p:sp>
       <p:pic>
         <p:nvPicPr>
-          <p:cNvPr id="5" name="Image 0" descr="/home/user/yawp/services/web-app/scripts/thesis-essay-decks/assets/icons/question.png">    </p:cNvPr>
+          <p:cNvPr id="5" name="Image 0" descr="question icon">    </p:cNvPr>
           <p:cNvPicPr>
             <a:picLocks noChangeAspect="1"/>
           </p:cNvPicPr>
@@ -26532,7 +26271,7 @@
       </p:sp>
       <p:pic>
         <p:nvPicPr>
-          <p:cNvPr id="5" name="Image 0" descr="/home/user/yawp/services/web-app/scripts/thesis-essay-decks/assets/icons/question.png">    </p:cNvPr>
+          <p:cNvPr id="5" name="Image 0" descr="question icon">    </p:cNvPr>
           <p:cNvPicPr>
             <a:picLocks noChangeAspect="1"/>
           </p:cNvPicPr>
@@ -27359,7 +27098,7 @@
       </p:sp>
       <p:pic>
         <p:nvPicPr>
-          <p:cNvPr id="5" name="Image 0" descr="/home/user/yawp/services/web-app/scripts/thesis-essay-decks/assets/icons/eye.png">    </p:cNvPr>
+          <p:cNvPr id="5" name="Image 0" descr="eye icon">    </p:cNvPr>
           <p:cNvPicPr>
             <a:picLocks noChangeAspect="1"/>
           </p:cNvPicPr>
@@ -27467,7 +27206,7 @@
       </p:sp>
       <p:pic>
         <p:nvPicPr>
-          <p:cNvPr id="9" name="Image 1" descr="/home/user/yawp/services/web-app/scripts/thesis-essay-decks/assets/elephant.jpg">    </p:cNvPr>
+          <p:cNvPr id="9" name="Image 1" descr="An elephant.">    </p:cNvPr>
           <p:cNvPicPr>
             <a:picLocks noChangeAspect="1"/>
           </p:cNvPicPr>
@@ -27920,7 +27659,7 @@
       </p:sp>
       <p:pic>
         <p:nvPicPr>
-          <p:cNvPr id="10" name="Image 0" descr="/home/user/yawp/services/web-app/scripts/thesis-essay-decks/assets/elephant.jpg">    </p:cNvPr>
+          <p:cNvPr id="10" name="Image 0" descr="An elephant.">    </p:cNvPr>
           <p:cNvPicPr>
             <a:picLocks noChangeAspect="1"/>
           </p:cNvPicPr>
@@ -27969,7 +27708,7 @@
       </p:sp>
       <p:pic>
         <p:nvPicPr>
-          <p:cNvPr id="12" name="Image 1" descr="/home/user/yawp/services/web-app/scripts/thesis-essay-decks/assets/icons/eye.png">    </p:cNvPr>
+          <p:cNvPr id="12" name="Image 1" descr="eye icon">    </p:cNvPr>
           <p:cNvPicPr>
             <a:picLocks noChangeAspect="1"/>
           </p:cNvPicPr>

--- a/services/web-app/resources/thesis-essay-decks/lesson-3-thesis-statement.pptx
+++ b/services/web-app/resources/thesis-essay-decks/lesson-3-thesis-statement.pptx
@@ -5562,7 +5562,7 @@
               <a:buNone/>
             </a:pPr>
             <a:r>
-              <a:rPr lang="en-US" sz="1300" b="1" spc="200" kern="0" dirty="0">
+              <a:rPr lang="en-US" sz="1300" b="1" dirty="0">
                 <a:solidFill>
                   <a:srgbClr val="02BDC7"/>
                 </a:solidFill>
@@ -5570,7 +5570,7 @@
                 <a:ea typeface="Consolas" pitchFamily="34" charset="-122"/>
                 <a:cs typeface="Consolas" pitchFamily="34" charset="-120"/>
               </a:rPr>
-              <a:t>THESIS-DRIVEN ESSAY · LESSON 3</a:t>
+              <a:t>Thesis-Driven Essay · Lesson 3</a:t>
             </a:r>
             <a:endParaRPr lang="en-US" sz="1300" dirty="0"/>
           </a:p>
@@ -5880,7 +5880,7 @@
               <a:buNone/>
             </a:pPr>
             <a:r>
-              <a:rPr lang="en-US" sz="1200" b="1" spc="200" kern="0" dirty="0">
+              <a:rPr lang="en-US" sz="1200" b="1" dirty="0">
                 <a:solidFill>
                   <a:srgbClr val="FFB600"/>
                 </a:solidFill>
@@ -5888,7 +5888,7 @@
                 <a:ea typeface="Consolas" pitchFamily="34" charset="-122"/>
                 <a:cs typeface="Consolas" pitchFamily="34" charset="-120"/>
               </a:rPr>
-              <a:t>THE REVEAL</a:t>
+              <a:t>The reveal</a:t>
             </a:r>
             <a:endParaRPr lang="en-US" sz="1200" dirty="0"/>
           </a:p>
@@ -6317,7 +6317,7 @@
               <a:buNone/>
             </a:pPr>
             <a:r>
-              <a:rPr lang="en-US" sz="1200" b="1" spc="200" kern="0" dirty="0">
+              <a:rPr lang="en-US" sz="1200" b="1" dirty="0">
                 <a:solidFill>
                   <a:srgbClr val="FC4540"/>
                 </a:solidFill>
@@ -6325,7 +6325,7 @@
                 <a:ea typeface="Consolas" pitchFamily="34" charset="-122"/>
                 <a:cs typeface="Consolas" pitchFamily="34" charset="-120"/>
               </a:rPr>
-              <a:t>QUICK REVIEW</a:t>
+              <a:t>Quick review</a:t>
             </a:r>
             <a:endParaRPr lang="en-US" sz="1200" dirty="0"/>
           </a:p>
@@ -6623,7 +6623,7 @@
               <a:buNone/>
             </a:pPr>
             <a:r>
-              <a:rPr lang="en-US" sz="1200" b="1" spc="200" kern="0" dirty="0">
+              <a:rPr lang="en-US" sz="1200" b="1" dirty="0">
                 <a:solidFill>
                   <a:srgbClr val="02BDC7"/>
                 </a:solidFill>
@@ -6631,7 +6631,7 @@
                 <a:ea typeface="Consolas" pitchFamily="34" charset="-122"/>
                 <a:cs typeface="Consolas" pitchFamily="34" charset="-120"/>
               </a:rPr>
-              <a:t>THE FORM</a:t>
+              <a:t>The form</a:t>
             </a:r>
             <a:endParaRPr lang="en-US" sz="1200" dirty="0"/>
           </a:p>
@@ -7570,7 +7570,7 @@
               <a:buNone/>
             </a:pPr>
             <a:r>
-              <a:rPr lang="en-US" sz="1200" b="1" spc="200" kern="0" dirty="0">
+              <a:rPr lang="en-US" sz="1200" b="1" dirty="0">
                 <a:solidFill>
                   <a:srgbClr val="FFB600"/>
                 </a:solidFill>
@@ -7578,7 +7578,7 @@
                 <a:ea typeface="Consolas" pitchFamily="34" charset="-122"/>
                 <a:cs typeface="Consolas" pitchFamily="34" charset="-120"/>
               </a:rPr>
-              <a:t>REMEMBER</a:t>
+              <a:t>Remember</a:t>
             </a:r>
             <a:endParaRPr lang="en-US" sz="1200" dirty="0"/>
           </a:p>
@@ -7887,7 +7887,7 @@
               <a:buNone/>
             </a:pPr>
             <a:r>
-              <a:rPr lang="en-US" sz="1200" b="1" spc="200" kern="0" dirty="0">
+              <a:rPr lang="en-US" sz="1200" b="1" dirty="0">
                 <a:solidFill>
                   <a:srgbClr val="FF9755"/>
                 </a:solidFill>
@@ -7895,7 +7895,7 @@
                 <a:ea typeface="Consolas" pitchFamily="34" charset="-122"/>
                 <a:cs typeface="Consolas" pitchFamily="34" charset="-120"/>
               </a:rPr>
-              <a:t>WHERE WE ARE</a:t>
+              <a:t>Where we are</a:t>
             </a:r>
             <a:endParaRPr lang="en-US" sz="1200" dirty="0"/>
           </a:p>
@@ -9017,7 +9017,7 @@
               <a:buNone/>
             </a:pPr>
             <a:r>
-              <a:rPr lang="en-US" sz="1200" b="1" spc="200" kern="0" dirty="0">
+              <a:rPr lang="en-US" sz="1200" b="1" dirty="0">
                 <a:solidFill>
                   <a:srgbClr val="FC4067"/>
                 </a:solidFill>
@@ -9025,7 +9025,7 @@
                 <a:ea typeface="Consolas" pitchFamily="34" charset="-122"/>
                 <a:cs typeface="Consolas" pitchFamily="34" charset="-120"/>
               </a:rPr>
-              <a:t>DEFINITION</a:t>
+              <a:t>Definition</a:t>
             </a:r>
             <a:endParaRPr lang="en-US" sz="1200" dirty="0"/>
           </a:p>
@@ -9334,7 +9334,7 @@
               <a:buNone/>
             </a:pPr>
             <a:r>
-              <a:rPr lang="en-US" sz="1200" b="1" spc="200" kern="0" dirty="0">
+              <a:rPr lang="en-US" sz="1200" b="1" dirty="0">
                 <a:solidFill>
                   <a:srgbClr val="FC4540"/>
                 </a:solidFill>
@@ -9342,7 +9342,7 @@
                 <a:ea typeface="Consolas" pitchFamily="34" charset="-122"/>
                 <a:cs typeface="Consolas" pitchFamily="34" charset="-120"/>
               </a:rPr>
-              <a:t>WORDING YOUR THESIS STATEMENT</a:t>
+              <a:t>Wording your thesis statement</a:t>
             </a:r>
             <a:endParaRPr lang="en-US" sz="1200" dirty="0"/>
           </a:p>
@@ -10148,7 +10148,7 @@
               <a:buNone/>
             </a:pPr>
             <a:r>
-              <a:rPr lang="en-US" sz="1200" b="1" spc="200" kern="0" dirty="0">
+              <a:rPr lang="en-US" sz="1200" b="1" dirty="0">
                 <a:solidFill>
                   <a:srgbClr val="02BDC7"/>
                 </a:solidFill>
@@ -10156,7 +10156,7 @@
                 <a:ea typeface="Consolas" pitchFamily="34" charset="-122"/>
                 <a:cs typeface="Consolas" pitchFamily="34" charset="-120"/>
               </a:rPr>
-              <a:t>OBSERVATION</a:t>
+              <a:t>Observation</a:t>
             </a:r>
             <a:endParaRPr lang="en-US" sz="1200" dirty="0"/>
           </a:p>
@@ -10454,7 +10454,7 @@
               <a:buNone/>
             </a:pPr>
             <a:r>
-              <a:rPr lang="en-US" sz="1200" b="1" spc="200" kern="0" dirty="0">
+              <a:rPr lang="en-US" sz="1200" b="1" dirty="0">
                 <a:solidFill>
                   <a:srgbClr val="02BDC7"/>
                 </a:solidFill>
@@ -10462,7 +10462,7 @@
                 <a:ea typeface="Consolas" pitchFamily="34" charset="-122"/>
                 <a:cs typeface="Consolas" pitchFamily="34" charset="-120"/>
               </a:rPr>
-              <a:t>OBSERVATION</a:t>
+              <a:t>Observation</a:t>
             </a:r>
             <a:endParaRPr lang="en-US" sz="1200" dirty="0"/>
           </a:p>
@@ -11325,7 +11325,7 @@
               <a:buNone/>
             </a:pPr>
             <a:r>
-              <a:rPr lang="en-US" sz="1200" b="1" spc="200" kern="0" dirty="0">
+              <a:rPr lang="en-US" sz="1200" b="1" dirty="0">
                 <a:solidFill>
                   <a:srgbClr val="02BDC7"/>
                 </a:solidFill>
@@ -11333,7 +11333,7 @@
                 <a:ea typeface="Consolas" pitchFamily="34" charset="-122"/>
                 <a:cs typeface="Consolas" pitchFamily="34" charset="-120"/>
               </a:rPr>
-              <a:t>OBSERVATION · EXAMPLE 1</a:t>
+              <a:t>Observation · example 1</a:t>
             </a:r>
             <a:endParaRPr lang="en-US" sz="1200" dirty="0"/>
           </a:p>
@@ -11617,7 +11617,7 @@
               <a:buNone/>
             </a:pPr>
             <a:r>
-              <a:rPr lang="en-US" sz="1200" b="1" spc="200" kern="0" dirty="0">
+              <a:rPr lang="en-US" sz="1200" b="1" dirty="0">
                 <a:solidFill>
                   <a:srgbClr val="02BDC7"/>
                 </a:solidFill>
@@ -11625,7 +11625,7 @@
                 <a:ea typeface="Consolas" pitchFamily="34" charset="-122"/>
                 <a:cs typeface="Consolas" pitchFamily="34" charset="-120"/>
               </a:rPr>
-              <a:t>OBSERVATION · EXAMPLE 2</a:t>
+              <a:t>Observation · example 2</a:t>
             </a:r>
             <a:endParaRPr lang="en-US" sz="1200" dirty="0"/>
           </a:p>
@@ -11909,7 +11909,7 @@
               <a:buNone/>
             </a:pPr>
             <a:r>
-              <a:rPr lang="en-US" sz="1200" b="1" spc="200" kern="0" dirty="0">
+              <a:rPr lang="en-US" sz="1200" b="1" dirty="0">
                 <a:solidFill>
                   <a:srgbClr val="02BDC7"/>
                 </a:solidFill>
@@ -11917,7 +11917,7 @@
                 <a:ea typeface="Consolas" pitchFamily="34" charset="-122"/>
                 <a:cs typeface="Consolas" pitchFamily="34" charset="-120"/>
               </a:rPr>
-              <a:t>OBSERVATION · EXAMPLE 3</a:t>
+              <a:t>Observation · example 3</a:t>
             </a:r>
             <a:endParaRPr lang="en-US" sz="1200" dirty="0"/>
           </a:p>
@@ -12201,7 +12201,7 @@
               <a:buNone/>
             </a:pPr>
             <a:r>
-              <a:rPr lang="en-US" sz="1200" b="1" spc="200" kern="0" dirty="0">
+              <a:rPr lang="en-US" sz="1200" b="1" dirty="0">
                 <a:solidFill>
                   <a:srgbClr val="02BDC7"/>
                 </a:solidFill>
@@ -12209,7 +12209,7 @@
                 <a:ea typeface="Consolas" pitchFamily="34" charset="-122"/>
                 <a:cs typeface="Consolas" pitchFamily="34" charset="-120"/>
               </a:rPr>
-              <a:t>OBSERVATION</a:t>
+              <a:t>Observation</a:t>
             </a:r>
             <a:endParaRPr lang="en-US" sz="1200" dirty="0"/>
           </a:p>
@@ -12937,7 +12937,7 @@
               <a:buNone/>
             </a:pPr>
             <a:r>
-              <a:rPr lang="en-US" sz="1200" b="1" spc="200" kern="0" dirty="0">
+              <a:rPr lang="en-US" sz="1200" b="1" dirty="0">
                 <a:solidFill>
                   <a:srgbClr val="FC4540"/>
                 </a:solidFill>
@@ -12945,7 +12945,7 @@
                 <a:ea typeface="Consolas" pitchFamily="34" charset="-122"/>
                 <a:cs typeface="Consolas" pitchFamily="34" charset="-120"/>
               </a:rPr>
-              <a:t>BUT</a:t>
+              <a:t>But</a:t>
             </a:r>
             <a:endParaRPr lang="en-US" sz="1200" dirty="0"/>
           </a:p>
@@ -13254,7 +13254,7 @@
               <a:buNone/>
             </a:pPr>
             <a:r>
-              <a:rPr lang="en-US" sz="1200" b="1" spc="200" kern="0" dirty="0">
+              <a:rPr lang="en-US" sz="1200" b="1" dirty="0">
                 <a:solidFill>
                   <a:srgbClr val="FF9755"/>
                 </a:solidFill>
@@ -13262,7 +13262,7 @@
                 <a:ea typeface="Consolas" pitchFamily="34" charset="-122"/>
                 <a:cs typeface="Consolas" pitchFamily="34" charset="-120"/>
               </a:rPr>
-              <a:t>ANALYSIS</a:t>
+              <a:t>Analysis</a:t>
             </a:r>
             <a:endParaRPr lang="en-US" sz="1200" dirty="0"/>
           </a:p>
@@ -13560,7 +13560,7 @@
               <a:buNone/>
             </a:pPr>
             <a:r>
-              <a:rPr lang="en-US" sz="1200" b="1" spc="200" kern="0" dirty="0">
+              <a:rPr lang="en-US" sz="1200" b="1" dirty="0">
                 <a:solidFill>
                   <a:srgbClr val="FF9755"/>
                 </a:solidFill>
@@ -13568,7 +13568,7 @@
                 <a:ea typeface="Consolas" pitchFamily="34" charset="-122"/>
                 <a:cs typeface="Consolas" pitchFamily="34" charset="-120"/>
               </a:rPr>
-              <a:t>ANALYSIS</a:t>
+              <a:t>Analysis</a:t>
             </a:r>
             <a:endParaRPr lang="en-US" sz="1200" dirty="0"/>
           </a:p>
@@ -13877,7 +13877,7 @@
               <a:buNone/>
             </a:pPr>
             <a:r>
-              <a:rPr lang="en-US" sz="1200" b="1" spc="200" kern="0" dirty="0">
+              <a:rPr lang="en-US" sz="1200" b="1" dirty="0">
                 <a:solidFill>
                   <a:srgbClr val="FFB600"/>
                 </a:solidFill>
@@ -13885,7 +13885,7 @@
                 <a:ea typeface="Consolas" pitchFamily="34" charset="-122"/>
                 <a:cs typeface="Consolas" pitchFamily="34" charset="-120"/>
               </a:rPr>
-              <a:t>ADD ANALYSIS</a:t>
+              <a:t>Add analysis</a:t>
             </a:r>
             <a:endParaRPr lang="en-US" sz="1200" dirty="0"/>
           </a:p>
@@ -14363,7 +14363,7 @@
               <a:buNone/>
             </a:pPr>
             <a:r>
-              <a:rPr lang="en-US" sz="1200" b="1" spc="200" kern="0" dirty="0">
+              <a:rPr lang="en-US" sz="1200" b="1" dirty="0">
                 <a:solidFill>
                   <a:srgbClr val="FC4540"/>
                 </a:solidFill>
@@ -14371,7 +14371,7 @@
                 <a:ea typeface="Consolas" pitchFamily="34" charset="-122"/>
                 <a:cs typeface="Consolas" pitchFamily="34" charset="-120"/>
               </a:rPr>
-              <a:t>ADD ANALYSIS</a:t>
+              <a:t>Add analysis</a:t>
             </a:r>
             <a:endParaRPr lang="en-US" sz="1200" dirty="0"/>
           </a:p>
@@ -14825,7 +14825,7 @@
               <a:buNone/>
             </a:pPr>
             <a:r>
-              <a:rPr lang="en-US" sz="1200" b="1" spc="200" kern="0" dirty="0">
+              <a:rPr lang="en-US" sz="1200" b="1" dirty="0">
                 <a:solidFill>
                   <a:srgbClr val="FF9755"/>
                 </a:solidFill>
@@ -14833,7 +14833,7 @@
                 <a:ea typeface="Consolas" pitchFamily="34" charset="-122"/>
                 <a:cs typeface="Consolas" pitchFamily="34" charset="-120"/>
               </a:rPr>
-              <a:t>ADD ANALYSIS</a:t>
+              <a:t>Add analysis</a:t>
             </a:r>
             <a:endParaRPr lang="en-US" sz="1200" dirty="0"/>
           </a:p>
@@ -15311,7 +15311,7 @@
               <a:buNone/>
             </a:pPr>
             <a:r>
-              <a:rPr lang="en-US" sz="1200" b="1" spc="200" kern="0" dirty="0">
+              <a:rPr lang="en-US" sz="1200" b="1" dirty="0">
                 <a:solidFill>
                   <a:srgbClr val="FC4540"/>
                 </a:solidFill>
@@ -15319,7 +15319,7 @@
                 <a:ea typeface="Consolas" pitchFamily="34" charset="-122"/>
                 <a:cs typeface="Consolas" pitchFamily="34" charset="-120"/>
               </a:rPr>
-              <a:t>REVIEW · 1 OF 3</a:t>
+              <a:t>Review · 1 of 3</a:t>
             </a:r>
             <a:endParaRPr lang="en-US" sz="1200" dirty="0"/>
           </a:p>
@@ -16135,7 +16135,7 @@
               <a:buNone/>
             </a:pPr>
             <a:r>
-              <a:rPr lang="en-US" sz="1200" b="1" spc="200" kern="0" dirty="0">
+              <a:rPr lang="en-US" sz="1200" b="1" dirty="0">
                 <a:solidFill>
                   <a:srgbClr val="02BDC7"/>
                 </a:solidFill>
@@ -16143,7 +16143,7 @@
                 <a:ea typeface="Consolas" pitchFamily="34" charset="-122"/>
                 <a:cs typeface="Consolas" pitchFamily="34" charset="-120"/>
               </a:rPr>
-              <a:t>WRITING ACTIVITY</a:t>
+              <a:t>Writing activity</a:t>
             </a:r>
             <a:endParaRPr lang="en-US" sz="1200" dirty="0"/>
           </a:p>
@@ -16711,7 +16711,7 @@
               <a:buNone/>
             </a:pPr>
             <a:r>
-              <a:rPr lang="en-US" sz="1200" b="1" spc="200" kern="0" dirty="0">
+              <a:rPr lang="en-US" sz="1200" b="1" dirty="0">
                 <a:solidFill>
                   <a:srgbClr val="FFB600"/>
                 </a:solidFill>
@@ -16719,7 +16719,7 @@
                 <a:ea typeface="Consolas" pitchFamily="34" charset="-122"/>
                 <a:cs typeface="Consolas" pitchFamily="34" charset="-120"/>
               </a:rPr>
-              <a:t>YOUR TURN</a:t>
+              <a:t>Your turn</a:t>
             </a:r>
             <a:endParaRPr lang="en-US" sz="1200" dirty="0"/>
           </a:p>
@@ -17658,7 +17658,7 @@
               <a:buNone/>
             </a:pPr>
             <a:r>
-              <a:rPr lang="en-US" sz="1200" b="1" spc="200" kern="0" dirty="0">
+              <a:rPr lang="en-US" sz="1200" b="1" dirty="0">
                 <a:solidFill>
                   <a:srgbClr val="FFB600"/>
                 </a:solidFill>
@@ -17666,7 +17666,7 @@
                 <a:ea typeface="Consolas" pitchFamily="34" charset="-122"/>
                 <a:cs typeface="Consolas" pitchFamily="34" charset="-120"/>
               </a:rPr>
-              <a:t>COMBINE O &amp; A TO FORM A THESIS</a:t>
+              <a:t>Combine O &amp; A to form a thesis</a:t>
             </a:r>
             <a:endParaRPr lang="en-US" sz="1200" dirty="0"/>
           </a:p>
@@ -18323,7 +18323,7 @@
               <a:buNone/>
             </a:pPr>
             <a:r>
-              <a:rPr lang="en-US" sz="1200" b="1" spc="200" kern="0" dirty="0">
+              <a:rPr lang="en-US" sz="1200" b="1" dirty="0">
                 <a:solidFill>
                   <a:srgbClr val="FC4540"/>
                 </a:solidFill>
@@ -18331,7 +18331,7 @@
                 <a:ea typeface="Consolas" pitchFamily="34" charset="-122"/>
                 <a:cs typeface="Consolas" pitchFamily="34" charset="-120"/>
               </a:rPr>
-              <a:t>COMBINE O &amp; A TO FORM A THESIS</a:t>
+              <a:t>Combine O &amp; A to form a thesis</a:t>
             </a:r>
             <a:endParaRPr lang="en-US" sz="1200" dirty="0"/>
           </a:p>
@@ -18964,7 +18964,7 @@
               <a:buNone/>
             </a:pPr>
             <a:r>
-              <a:rPr lang="en-US" sz="1200" b="1" spc="200" kern="0" dirty="0">
+              <a:rPr lang="en-US" sz="1200" b="1" dirty="0">
                 <a:solidFill>
                   <a:srgbClr val="FF9755"/>
                 </a:solidFill>
@@ -18972,7 +18972,7 @@
                 <a:ea typeface="Consolas" pitchFamily="34" charset="-122"/>
                 <a:cs typeface="Consolas" pitchFamily="34" charset="-120"/>
               </a:rPr>
-              <a:t>COMBINE O &amp; A TO FORM A THESIS</a:t>
+              <a:t>Combine O &amp; A to form a thesis</a:t>
             </a:r>
             <a:endParaRPr lang="en-US" sz="1200" dirty="0"/>
           </a:p>
@@ -19636,7 +19636,7 @@
               <a:buNone/>
             </a:pPr>
             <a:r>
-              <a:rPr lang="en-US" sz="1200" b="1" spc="200" kern="0" dirty="0">
+              <a:rPr lang="en-US" sz="1200" b="1" dirty="0">
                 <a:solidFill>
                   <a:srgbClr val="FC4067"/>
                 </a:solidFill>
@@ -19644,7 +19644,7 @@
                 <a:ea typeface="Consolas" pitchFamily="34" charset="-122"/>
                 <a:cs typeface="Consolas" pitchFamily="34" charset="-120"/>
               </a:rPr>
-              <a:t>THE 2 COMPONENTS OF AN EFFECTIVE THESIS</a:t>
+              <a:t>The 2 components of an effective thesis</a:t>
             </a:r>
             <a:endParaRPr lang="en-US" sz="1200" dirty="0"/>
           </a:p>
@@ -20189,7 +20189,7 @@
               <a:buNone/>
             </a:pPr>
             <a:r>
-              <a:rPr lang="en-US" sz="1200" b="1" spc="200" kern="0" dirty="0">
+              <a:rPr lang="en-US" sz="1200" b="1" dirty="0">
                 <a:solidFill>
                   <a:srgbClr val="FFB600"/>
                 </a:solidFill>
@@ -20197,7 +20197,7 @@
                 <a:ea typeface="Consolas" pitchFamily="34" charset="-122"/>
                 <a:cs typeface="Consolas" pitchFamily="34" charset="-120"/>
               </a:rPr>
-              <a:t>DON’T FORGET</a:t>
+              <a:t>Don’t forget</a:t>
             </a:r>
             <a:endParaRPr lang="en-US" sz="1200" dirty="0"/>
           </a:p>
@@ -20495,7 +20495,7 @@
               <a:buNone/>
             </a:pPr>
             <a:r>
-              <a:rPr lang="en-US" sz="1200" b="1" spc="200" kern="0" dirty="0">
+              <a:rPr lang="en-US" sz="1200" b="1" dirty="0">
                 <a:solidFill>
                   <a:srgbClr val="FC4540"/>
                 </a:solidFill>
@@ -20503,7 +20503,7 @@
                 <a:ea typeface="Consolas" pitchFamily="34" charset="-122"/>
                 <a:cs typeface="Consolas" pitchFamily="34" charset="-120"/>
               </a:rPr>
-              <a:t>THESIS REVIEW</a:t>
+              <a:t>Thesis review</a:t>
             </a:r>
             <a:endParaRPr lang="en-US" sz="1200" dirty="0"/>
           </a:p>
@@ -21824,7 +21824,7 @@
               <a:buNone/>
             </a:pPr>
             <a:r>
-              <a:rPr lang="en-US" sz="1200" b="1" spc="200" kern="0" dirty="0">
+              <a:rPr lang="en-US" sz="1200" b="1" dirty="0">
                 <a:solidFill>
                   <a:srgbClr val="FC4067"/>
                 </a:solidFill>
@@ -21832,7 +21832,7 @@
                 <a:ea typeface="Consolas" pitchFamily="34" charset="-122"/>
                 <a:cs typeface="Consolas" pitchFamily="34" charset="-120"/>
               </a:rPr>
-              <a:t>THESIS 2.0</a:t>
+              <a:t>Thesis 2.0</a:t>
             </a:r>
             <a:endParaRPr lang="en-US" sz="1200" dirty="0"/>
           </a:p>
@@ -22130,7 +22130,7 @@
               <a:buNone/>
             </a:pPr>
             <a:r>
-              <a:rPr lang="en-US" sz="1200" b="1" spc="200" kern="0" dirty="0">
+              <a:rPr lang="en-US" sz="1200" b="1" dirty="0">
                 <a:solidFill>
                   <a:srgbClr val="FF9755"/>
                 </a:solidFill>
@@ -22138,7 +22138,7 @@
                 <a:ea typeface="Consolas" pitchFamily="34" charset="-122"/>
                 <a:cs typeface="Consolas" pitchFamily="34" charset="-120"/>
               </a:rPr>
-              <a:t>REVIEW · 1 OF 3</a:t>
+              <a:t>Review · 1 of 3</a:t>
             </a:r>
             <a:endParaRPr lang="en-US" sz="1200" dirty="0"/>
           </a:p>
@@ -22957,7 +22957,7 @@
               <a:buNone/>
             </a:pPr>
             <a:r>
-              <a:rPr lang="en-US" sz="1200" b="1" spc="200" kern="0" dirty="0">
+              <a:rPr lang="en-US" sz="1200" b="1" dirty="0">
                 <a:solidFill>
                   <a:srgbClr val="FC4067"/>
                 </a:solidFill>
@@ -22965,7 +22965,7 @@
                 <a:ea typeface="Consolas" pitchFamily="34" charset="-122"/>
                 <a:cs typeface="Consolas" pitchFamily="34" charset="-120"/>
               </a:rPr>
-              <a:t>WITH THE VERB “TO BE”</a:t>
+              <a:t>With the verb “to be”</a:t>
             </a:r>
             <a:endParaRPr lang="en-US" sz="1200" dirty="0"/>
           </a:p>
@@ -23374,7 +23374,7 @@
               <a:buNone/>
             </a:pPr>
             <a:r>
-              <a:rPr lang="en-US" sz="1200" b="1" spc="200" kern="0" dirty="0">
+              <a:rPr lang="en-US" sz="1200" b="1" dirty="0">
                 <a:solidFill>
                   <a:srgbClr val="02BDC7"/>
                 </a:solidFill>
@@ -23382,7 +23382,7 @@
                 <a:ea typeface="Consolas" pitchFamily="34" charset="-122"/>
                 <a:cs typeface="Consolas" pitchFamily="34" charset="-120"/>
               </a:rPr>
-              <a:t>CHANGE TO</a:t>
+              <a:t>Change to</a:t>
             </a:r>
             <a:endParaRPr lang="en-US" sz="1200" dirty="0"/>
           </a:p>
@@ -23691,7 +23691,7 @@
               <a:buNone/>
             </a:pPr>
             <a:r>
-              <a:rPr lang="en-US" sz="1200" b="1" spc="200" kern="0" dirty="0">
+              <a:rPr lang="en-US" sz="1200" b="1" dirty="0">
                 <a:solidFill>
                   <a:srgbClr val="FFB600"/>
                 </a:solidFill>
@@ -23699,7 +23699,7 @@
                 <a:ea typeface="Consolas" pitchFamily="34" charset="-122"/>
                 <a:cs typeface="Consolas" pitchFamily="34" charset="-120"/>
               </a:rPr>
-              <a:t>BEFORE AND AFTER</a:t>
+              <a:t>Before and after</a:t>
             </a:r>
             <a:endParaRPr lang="en-US" sz="1200" dirty="0"/>
           </a:p>
@@ -24182,7 +24182,7 @@
               <a:buNone/>
             </a:pPr>
             <a:r>
-              <a:rPr lang="en-US" sz="1200" b="1" spc="200" kern="0" dirty="0">
+              <a:rPr lang="en-US" sz="1200" b="1" dirty="0">
                 <a:solidFill>
                   <a:srgbClr val="FFB600"/>
                 </a:solidFill>
@@ -24190,7 +24190,7 @@
                 <a:ea typeface="Consolas" pitchFamily="34" charset="-122"/>
                 <a:cs typeface="Consolas" pitchFamily="34" charset="-120"/>
               </a:rPr>
-              <a:t>BUT WAIT</a:t>
+              <a:t>But wait</a:t>
             </a:r>
             <a:endParaRPr lang="en-US" sz="1200" dirty="0"/>
           </a:p>
@@ -24488,7 +24488,7 @@
               <a:buNone/>
             </a:pPr>
             <a:r>
-              <a:rPr lang="en-US" sz="1200" b="1" spc="200" kern="0" dirty="0">
+              <a:rPr lang="en-US" sz="1200" b="1" dirty="0">
                 <a:solidFill>
                   <a:srgbClr val="02BDC7"/>
                 </a:solidFill>
@@ -24496,7 +24496,7 @@
                 <a:ea typeface="Consolas" pitchFamily="34" charset="-122"/>
                 <a:cs typeface="Consolas" pitchFamily="34" charset="-120"/>
               </a:rPr>
-              <a:t>WEEDING THE GARDEN</a:t>
+              <a:t>Weeding the garden</a:t>
             </a:r>
             <a:endParaRPr lang="en-US" sz="1200" dirty="0"/>
           </a:p>
@@ -24805,7 +24805,7 @@
               <a:buNone/>
             </a:pPr>
             <a:r>
-              <a:rPr lang="en-US" sz="1200" b="1" spc="200" kern="0" dirty="0">
+              <a:rPr lang="en-US" sz="1200" b="1" dirty="0">
                 <a:solidFill>
                   <a:srgbClr val="02BDC7"/>
                 </a:solidFill>
@@ -24813,7 +24813,7 @@
                 <a:ea typeface="Consolas" pitchFamily="34" charset="-122"/>
                 <a:cs typeface="Consolas" pitchFamily="34" charset="-120"/>
               </a:rPr>
-              <a:t>THIS CAN NOW BECOME THIS</a:t>
+              <a:t>This can now become this</a:t>
             </a:r>
             <a:endParaRPr lang="en-US" sz="1200" dirty="0"/>
           </a:p>
@@ -25504,7 +25504,7 @@
               <a:buNone/>
             </a:pPr>
             <a:r>
-              <a:rPr lang="en-US" sz="1200" b="1" spc="200" kern="0" dirty="0">
+              <a:rPr lang="en-US" sz="1200" b="1" dirty="0">
                 <a:solidFill>
                   <a:srgbClr val="FC4540"/>
                 </a:solidFill>
@@ -25512,7 +25512,7 @@
                 <a:ea typeface="Consolas" pitchFamily="34" charset="-122"/>
                 <a:cs typeface="Consolas" pitchFamily="34" charset="-120"/>
               </a:rPr>
-              <a:t>WHOA</a:t>
+              <a:t>Whoa</a:t>
             </a:r>
             <a:endParaRPr lang="en-US" sz="1200" dirty="0"/>
           </a:p>
@@ -26322,7 +26322,7 @@
               <a:buNone/>
             </a:pPr>
             <a:r>
-              <a:rPr lang="en-US" sz="1200" b="1" spc="200" kern="0" dirty="0">
+              <a:rPr lang="en-US" sz="1200" b="1" dirty="0">
                 <a:solidFill>
                   <a:srgbClr val="FC4067"/>
                 </a:solidFill>
@@ -26330,7 +26330,7 @@
                 <a:ea typeface="Consolas" pitchFamily="34" charset="-122"/>
                 <a:cs typeface="Consolas" pitchFamily="34" charset="-120"/>
               </a:rPr>
-              <a:t>REVIEW · 2 OF 3</a:t>
+              <a:t>Review · 2 of 3</a:t>
             </a:r>
             <a:endParaRPr lang="en-US" sz="1200" dirty="0"/>
           </a:p>
@@ -27146,7 +27146,7 @@
               <a:buNone/>
             </a:pPr>
             <a:r>
-              <a:rPr lang="en-US" sz="1200" b="1" spc="200" kern="0" dirty="0">
+              <a:rPr lang="en-US" sz="1200" b="1" dirty="0">
                 <a:solidFill>
                   <a:srgbClr val="02BDC7"/>
                 </a:solidFill>
@@ -27154,7 +27154,7 @@
                 <a:ea typeface="Consolas" pitchFamily="34" charset="-122"/>
                 <a:cs typeface="Consolas" pitchFamily="34" charset="-120"/>
               </a:rPr>
-              <a:t>REVIEW · 2 OF 3</a:t>
+              <a:t>Review · 2 of 3</a:t>
             </a:r>
             <a:endParaRPr lang="en-US" sz="1200" dirty="0"/>
           </a:p>
@@ -27973,7 +27973,7 @@
               <a:buNone/>
             </a:pPr>
             <a:r>
-              <a:rPr lang="en-US" sz="1200" b="1" spc="200" kern="0" dirty="0">
+              <a:rPr lang="en-US" sz="1200" b="1" dirty="0">
                 <a:solidFill>
                   <a:srgbClr val="FFB600"/>
                 </a:solidFill>
@@ -27981,7 +27981,7 @@
                 <a:ea typeface="Consolas" pitchFamily="34" charset="-122"/>
                 <a:cs typeface="Consolas" pitchFamily="34" charset="-120"/>
               </a:rPr>
-              <a:t>REVIEW · 3 OF 3</a:t>
+              <a:t>Review · 3 of 3</a:t>
             </a:r>
             <a:endParaRPr lang="en-US" sz="1200" dirty="0"/>
           </a:p>
@@ -28797,7 +28797,7 @@
               <a:buNone/>
             </a:pPr>
             <a:r>
-              <a:rPr lang="en-US" sz="1200" b="1" spc="200" kern="0" dirty="0">
+              <a:rPr lang="en-US" sz="1200" b="1" dirty="0">
                 <a:solidFill>
                   <a:srgbClr val="FC4540"/>
                 </a:solidFill>
@@ -28805,7 +28805,7 @@
                 <a:ea typeface="Consolas" pitchFamily="34" charset="-122"/>
                 <a:cs typeface="Consolas" pitchFamily="34" charset="-120"/>
               </a:rPr>
-              <a:t>REVIEW · 3 OF 3</a:t>
+              <a:t>Review · 3 of 3</a:t>
             </a:r>
             <a:endParaRPr lang="en-US" sz="1200" dirty="0"/>
           </a:p>
@@ -29624,7 +29624,7 @@
               <a:buNone/>
             </a:pPr>
             <a:r>
-              <a:rPr lang="en-US" sz="1200" b="1" spc="200" kern="0" dirty="0">
+              <a:rPr lang="en-US" sz="1200" b="1" dirty="0">
                 <a:solidFill>
                   <a:srgbClr val="02BDC7"/>
                 </a:solidFill>
@@ -29632,7 +29632,7 @@
                 <a:ea typeface="Consolas" pitchFamily="34" charset="-122"/>
                 <a:cs typeface="Consolas" pitchFamily="34" charset="-120"/>
               </a:rPr>
-              <a:t>WARM-UP · OBSERVE</a:t>
+              <a:t>Warm-up · Observe</a:t>
             </a:r>
             <a:endParaRPr lang="en-US" sz="1200" dirty="0"/>
           </a:p>
